--- a/Slides/Semana 12/semana_12_slides.pptx
+++ b/Slides/Semana 12/semana_12_slides.pptx
@@ -978,7 +978,7 @@
 - "Se a execução for fora da aula, como e quando vocês vão me avisar como foi?"
 - "O que vocês fariam se [imprevisto plausível para a atividade da equipe] acontecesse?"
 Avaliação nesta semana: início da observação central de Execução, segundo a Rubrica de Avaliação. Observam-se também Interação com a Comunidade (comunicação com o público durante a execução), Documentação (início efetivo do registro de evidências), Gestão do Projeto (capacidade de reportar o andamento, inclusive fora do horário de aula) e Trabalho em Equipe (distribuição de papéis observada na execução).
-Fonte: Plano Semanal Semana 12, Cronograma, CLAUDE.md, COURSE_CONTEXT.md, PEDAGOGICAL_RULES.md, EXTENSION_PROJECT_GUIDE.md.</a:t>
+Fonte: Plano Semanal Semana 12, Cronograma.</a:t>
             </a:r>
             <a:endParaRPr lang="en-US" dirty="0"/>
           </a:p>
